--- a/media/resources/files/Onduktar_Koboytuu_BoluuJenilBingo_0tIFtGb.pptx
+++ b/media/resources/files/Onduktar_Koboytuu_BoluuJenilBingo_0tIFtGb.pptx
@@ -18396,7 +18396,7 @@
                 <a:ea typeface="+mn-ea"/>
                 <a:cs typeface="+mn-cs"/>
               </a:rPr>
-              <a:t>Турдуу пикирлер учун ыраазычылык билдиребиз.</a:t>
+              <a:t>Түрдүү пикирлер үчүн ыраазычылык билдиребиз.</a:t>
             </a:r>
           </a:p>
           <a:p>

--- a/media/resources/files/Onduktar_Koboytuu_BoluuJenilBingo_0tIFtGb.pptx
+++ b/media/resources/files/Onduktar_Koboytuu_BoluuJenilBingo_0tIFtGb.pptx
@@ -3638,7 +3638,7 @@
                 <a:ea typeface="+mn-ea"/>
                 <a:cs typeface="+mn-cs"/>
               </a:rPr>
-              <a:t>Окуучулар </a:t>
+              <a:t>Окуучулар тордон тогуз жоопту тандап, дептердеги 3х3 чакмакка каалагандай коюшат.</a:t>
             </a:r>
             <a:r>
               <a:rPr kumimoji="0" lang="ru-RU" sz="2400" b="0" i="0" u="none" strike="noStrike" kern="1200" cap="none" spc="0" normalizeH="0" baseline="0" noProof="0" dirty="0">
@@ -3655,7 +3655,7 @@
                 <a:ea typeface="+mn-ea"/>
                 <a:cs typeface="+mn-cs"/>
               </a:rPr>
-              <a:t>суроо</a:t>
+              <a:t/>
             </a:r>
             <a:r>
               <a:rPr kumimoji="0" lang="en-US" sz="2400" b="0" i="0" u="none" strike="noStrike" kern="1200" cap="none" spc="0" normalizeH="0" baseline="0" noProof="0" dirty="0">
@@ -3672,7 +3672,7 @@
                 <a:ea typeface="+mn-ea"/>
                 <a:cs typeface="+mn-cs"/>
               </a:rPr>
-              <a:t> </a:t>
+              <a:t/>
             </a:r>
             <a:r>
               <a:rPr kumimoji="0" lang="en-US" sz="2400" b="0" i="0" u="none" strike="noStrike" kern="1200" cap="none" spc="0" normalizeH="0" baseline="0" noProof="0" dirty="0" err="1">
@@ -3689,7 +3689,7 @@
                 <a:ea typeface="+mn-ea"/>
                 <a:cs typeface="+mn-cs"/>
               </a:rPr>
-              <a:t>тордон</a:t>
+              <a:t/>
             </a:r>
             <a:r>
               <a:rPr kumimoji="0" lang="en-US" sz="2400" b="0" i="0" u="none" strike="noStrike" kern="1200" cap="none" spc="0" normalizeH="0" baseline="0" noProof="0" dirty="0">
@@ -3706,7 +3706,7 @@
                 <a:ea typeface="+mn-ea"/>
                 <a:cs typeface="+mn-cs"/>
               </a:rPr>
-              <a:t> </a:t>
+              <a:t/>
             </a:r>
             <a:r>
               <a:rPr kumimoji="0" lang="en-US" sz="2000" b="0" i="0" u="none" strike="noStrike" kern="1200" cap="none" spc="0" normalizeH="0" baseline="0" noProof="0" dirty="0" err="1">
@@ -3723,7 +3723,7 @@
                 <a:ea typeface="+mn-ea"/>
                 <a:cs typeface="+mn-cs"/>
               </a:rPr>
-              <a:t>тогуз</a:t>
+              <a:t/>
             </a:r>
             <a:r>
               <a:rPr kumimoji="0" lang="en-US" sz="2000" b="0" i="0" u="none" strike="noStrike" kern="1200" cap="none" spc="0" normalizeH="0" baseline="0" noProof="0" dirty="0">
@@ -3740,7 +3740,7 @@
                 <a:ea typeface="+mn-ea"/>
                 <a:cs typeface="+mn-cs"/>
               </a:rPr>
-              <a:t> </a:t>
+              <a:t/>
             </a:r>
             <a:r>
               <a:rPr kumimoji="0" lang="en-US" sz="2000" b="0" i="0" u="none" strike="noStrike" kern="1200" cap="none" spc="0" normalizeH="0" baseline="0" noProof="0" dirty="0" err="1">
@@ -3757,7 +3757,7 @@
                 <a:ea typeface="+mn-ea"/>
                 <a:cs typeface="+mn-cs"/>
               </a:rPr>
-              <a:t>жоопту</a:t>
+              <a:t/>
             </a:r>
             <a:r>
               <a:rPr kumimoji="0" lang="en-US" sz="2000" b="0" i="0" u="none" strike="noStrike" kern="1200" cap="none" spc="0" normalizeH="0" baseline="0" noProof="0" dirty="0">
@@ -3774,7 +3774,7 @@
                 <a:ea typeface="+mn-ea"/>
                 <a:cs typeface="+mn-cs"/>
               </a:rPr>
-              <a:t> </a:t>
+              <a:t/>
             </a:r>
             <a:r>
               <a:rPr kumimoji="0" lang="en-US" sz="2000" b="0" i="0" u="none" strike="noStrike" kern="1200" cap="none" spc="0" normalizeH="0" baseline="0" noProof="0" dirty="0" err="1">
@@ -3791,7 +3791,7 @@
                 <a:ea typeface="+mn-ea"/>
                 <a:cs typeface="+mn-cs"/>
               </a:rPr>
-              <a:t>тандап</a:t>
+              <a:t/>
             </a:r>
             <a:r>
               <a:rPr kumimoji="0" lang="en-US" sz="2000" b="0" i="0" u="none" strike="noStrike" kern="1200" cap="none" spc="0" normalizeH="0" baseline="0" noProof="0" dirty="0">
@@ -3808,7 +3808,7 @@
                 <a:ea typeface="+mn-ea"/>
                 <a:cs typeface="+mn-cs"/>
               </a:rPr>
-              <a:t>, </a:t>
+              <a:t/>
             </a:r>
             <a:r>
               <a:rPr kumimoji="0" lang="en-US" sz="2000" b="0" i="0" u="none" strike="noStrike" kern="1200" cap="none" spc="0" normalizeH="0" baseline="0" noProof="0" dirty="0" err="1">
@@ -3825,7 +3825,7 @@
                 <a:ea typeface="+mn-ea"/>
                 <a:cs typeface="+mn-cs"/>
               </a:rPr>
-              <a:t>аларды</a:t>
+              <a:t/>
             </a:r>
             <a:r>
               <a:rPr kumimoji="0" lang="en-US" sz="2000" b="0" i="0" u="none" strike="noStrike" kern="1200" cap="none" spc="0" normalizeH="0" baseline="0" noProof="0" dirty="0">
@@ -3842,7 +3842,7 @@
                 <a:ea typeface="+mn-ea"/>
                 <a:cs typeface="+mn-cs"/>
               </a:rPr>
-              <a:t> </a:t>
+              <a:t/>
             </a:r>
             <a:r>
               <a:rPr kumimoji="0" lang="ru-RU" sz="2000" b="0" i="0" u="none" strike="noStrike" kern="1200" cap="none" spc="0" normalizeH="0" baseline="0" noProof="0" dirty="0">
@@ -3859,7 +3859,7 @@
                 <a:ea typeface="+mn-ea"/>
                 <a:cs typeface="+mn-cs"/>
               </a:rPr>
-              <a:t>дептериндеги</a:t>
+              <a:t/>
             </a:r>
             <a:r>
               <a:rPr kumimoji="0" lang="en-US" sz="2000" b="0" i="0" u="none" strike="noStrike" kern="1200" cap="none" spc="0" normalizeH="0" baseline="0" noProof="0" dirty="0">
@@ -3876,7 +3876,7 @@
                 <a:ea typeface="+mn-ea"/>
                 <a:cs typeface="+mn-cs"/>
               </a:rPr>
-              <a:t> 3х3 </a:t>
+              <a:t/>
             </a:r>
             <a:r>
               <a:rPr kumimoji="0" lang="en-US" sz="2000" b="0" i="0" u="none" strike="noStrike" kern="1200" cap="none" spc="0" normalizeH="0" baseline="0" noProof="0" dirty="0" err="1">
@@ -3893,7 +3893,7 @@
                 <a:ea typeface="+mn-ea"/>
                 <a:cs typeface="+mn-cs"/>
               </a:rPr>
-              <a:t>квадратка</a:t>
+              <a:t/>
             </a:r>
             <a:r>
               <a:rPr kumimoji="0" lang="en-US" sz="2000" b="0" i="0" u="none" strike="noStrike" kern="1200" cap="none" spc="0" normalizeH="0" baseline="0" noProof="0" dirty="0">
@@ -3910,7 +3910,7 @@
                 <a:ea typeface="+mn-ea"/>
                 <a:cs typeface="+mn-cs"/>
               </a:rPr>
-              <a:t> </a:t>
+              <a:t/>
             </a:r>
             <a:r>
               <a:rPr kumimoji="0" lang="en-US" sz="2000" b="0" i="0" u="none" strike="noStrike" kern="1200" cap="none" spc="0" normalizeH="0" baseline="0" noProof="0" dirty="0" err="1">
@@ -3927,7 +3927,7 @@
                 <a:ea typeface="+mn-ea"/>
                 <a:cs typeface="+mn-cs"/>
               </a:rPr>
-              <a:t>туш</a:t>
+              <a:t/>
             </a:r>
             <a:r>
               <a:rPr kumimoji="0" lang="en-US" sz="2000" b="0" i="0" u="none" strike="noStrike" kern="1200" cap="none" spc="0" normalizeH="0" baseline="0" noProof="0" dirty="0">
@@ -3944,7 +3944,7 @@
                 <a:ea typeface="+mn-ea"/>
                 <a:cs typeface="+mn-cs"/>
               </a:rPr>
-              <a:t> </a:t>
+              <a:t/>
             </a:r>
             <a:r>
               <a:rPr kumimoji="0" lang="en-US" sz="2000" b="0" i="0" u="none" strike="noStrike" kern="1200" cap="none" spc="0" normalizeH="0" baseline="0" noProof="0" dirty="0" err="1">
@@ -3961,7 +3961,7 @@
                 <a:ea typeface="+mn-ea"/>
                 <a:cs typeface="+mn-cs"/>
               </a:rPr>
-              <a:t>келди</a:t>
+              <a:t/>
             </a:r>
             <a:r>
               <a:rPr kumimoji="0" lang="en-US" sz="2000" b="0" i="0" u="none" strike="noStrike" kern="1200" cap="none" spc="0" normalizeH="0" baseline="0" noProof="0" dirty="0">
@@ -3978,7 +3978,7 @@
                 <a:ea typeface="+mn-ea"/>
                 <a:cs typeface="+mn-cs"/>
               </a:rPr>
-              <a:t> </a:t>
+              <a:t/>
             </a:r>
             <a:r>
               <a:rPr kumimoji="0" lang="en-US" sz="2000" b="0" i="0" u="none" strike="noStrike" kern="1200" cap="none" spc="0" normalizeH="0" baseline="0" noProof="0" dirty="0" err="1">
@@ -3995,7 +3995,7 @@
                 <a:ea typeface="+mn-ea"/>
                 <a:cs typeface="+mn-cs"/>
               </a:rPr>
-              <a:t>жайгаштырышы</a:t>
+              <a:t/>
             </a:r>
             <a:r>
               <a:rPr kumimoji="0" lang="en-US" sz="2000" b="0" i="0" u="none" strike="noStrike" kern="1200" cap="none" spc="0" normalizeH="0" baseline="0" noProof="0" dirty="0">
@@ -4012,7 +4012,7 @@
                 <a:ea typeface="+mn-ea"/>
                 <a:cs typeface="+mn-cs"/>
               </a:rPr>
-              <a:t> </a:t>
+              <a:t/>
             </a:r>
             <a:r>
               <a:rPr kumimoji="0" lang="en-US" sz="2000" b="0" i="0" u="none" strike="noStrike" kern="1200" cap="none" spc="0" normalizeH="0" baseline="0" noProof="0" dirty="0" err="1">
@@ -4029,7 +4029,7 @@
                 <a:ea typeface="+mn-ea"/>
                 <a:cs typeface="+mn-cs"/>
               </a:rPr>
-              <a:t>керек</a:t>
+              <a:t/>
             </a:r>
             <a:r>
               <a:rPr kumimoji="0" lang="en-US" sz="2000" b="0" i="0" u="none" strike="noStrike" kern="1200" cap="none" spc="0" normalizeH="0" baseline="0" noProof="0" dirty="0">
@@ -4046,7 +4046,7 @@
                 <a:ea typeface="+mn-ea"/>
                 <a:cs typeface="+mn-cs"/>
               </a:rPr>
-              <a:t>.</a:t>
+              <a:t/>
             </a:r>
           </a:p>
           <a:p>
@@ -5331,7 +5331,7 @@
                   <a:schemeClr val="tx1"/>
                 </a:solidFill>
               </a:rPr>
-              <a:t>8.4</a:t>
+              <a:t>8,4</a:t>
             </a:r>
           </a:p>
         </p:txBody>
@@ -5367,7 +5367,7 @@
             <a:pPr algn="ctr"/>
             <a:r>
               <a:rPr lang="en-GB" sz="8800" dirty="0"/>
-              <a:t>1.2 × 7</a:t>
+              <a:t>1,2 × 7</a:t>
             </a:r>
           </a:p>
         </p:txBody>
@@ -5655,7 +5655,7 @@
                   <a:schemeClr val="tx1"/>
                 </a:solidFill>
               </a:rPr>
-              <a:t>0.2</a:t>
+              <a:t>0,2</a:t>
             </a:r>
           </a:p>
         </p:txBody>
@@ -5691,7 +5691,7 @@
             <a:pPr algn="ctr"/>
             <a:r>
               <a:rPr lang="en-GB" sz="8800" dirty="0"/>
-              <a:t>0.8 ÷ 4</a:t>
+              <a:t>0,8 ÷ 4</a:t>
             </a:r>
           </a:p>
         </p:txBody>
@@ -5979,7 +5979,7 @@
                   <a:schemeClr val="tx1"/>
                 </a:solidFill>
               </a:rPr>
-              <a:t>0.18</a:t>
+              <a:t>0,18</a:t>
             </a:r>
           </a:p>
         </p:txBody>
@@ -6015,7 +6015,7 @@
             <a:pPr algn="ctr"/>
             <a:r>
               <a:rPr lang="en-GB" sz="8800" dirty="0"/>
-              <a:t>0.2 × 0.9</a:t>
+              <a:t>0,2 × 0,9</a:t>
             </a:r>
           </a:p>
         </p:txBody>
@@ -6339,7 +6339,7 @@
             <a:pPr algn="ctr"/>
             <a:r>
               <a:rPr lang="en-GB" sz="8800" dirty="0"/>
-              <a:t>2.8 ÷ 1.4</a:t>
+              <a:t>2,8 ÷ 1,4</a:t>
             </a:r>
           </a:p>
         </p:txBody>
@@ -6627,7 +6627,7 @@
                   <a:schemeClr val="tx1"/>
                 </a:solidFill>
               </a:rPr>
-              <a:t>0.64</a:t>
+              <a:t>0,64</a:t>
             </a:r>
           </a:p>
         </p:txBody>
@@ -6663,7 +6663,7 @@
             <a:pPr algn="ctr"/>
             <a:r>
               <a:rPr lang="en-GB" sz="8800" dirty="0"/>
-              <a:t>0.2 × 3.2</a:t>
+              <a:t>0,2 × 3,2</a:t>
             </a:r>
           </a:p>
         </p:txBody>
@@ -6951,7 +6951,7 @@
                   <a:schemeClr val="tx1"/>
                 </a:solidFill>
               </a:rPr>
-              <a:t>0.35</a:t>
+              <a:t>0,35</a:t>
             </a:r>
           </a:p>
         </p:txBody>
@@ -6987,7 +6987,7 @@
             <a:pPr algn="ctr"/>
             <a:r>
               <a:rPr lang="en-GB" sz="8800" dirty="0"/>
-              <a:t>0.7 ÷ 2</a:t>
+              <a:t>0,7 ÷ 2</a:t>
             </a:r>
           </a:p>
         </p:txBody>
@@ -7311,7 +7311,7 @@
             <a:pPr algn="ctr"/>
             <a:r>
               <a:rPr lang="en-GB" sz="8800" dirty="0"/>
-              <a:t>1.5 ÷ 0.5</a:t>
+              <a:t>1,5 ÷ 0,5</a:t>
             </a:r>
           </a:p>
         </p:txBody>
@@ -7599,7 +7599,7 @@
                   <a:schemeClr val="tx1"/>
                 </a:solidFill>
               </a:rPr>
-              <a:t>0.42</a:t>
+              <a:t>0,42</a:t>
             </a:r>
           </a:p>
         </p:txBody>
@@ -7635,7 +7635,7 @@
             <a:pPr algn="ctr"/>
             <a:r>
               <a:rPr lang="en-GB" sz="8800" dirty="0"/>
-              <a:t>1.4 × 0.3</a:t>
+              <a:t>1,4 × 0,3</a:t>
             </a:r>
           </a:p>
         </p:txBody>
@@ -7923,7 +7923,7 @@
                   <a:schemeClr val="tx1"/>
                 </a:solidFill>
               </a:rPr>
-              <a:t>0.16</a:t>
+              <a:t>0,16</a:t>
             </a:r>
           </a:p>
         </p:txBody>
@@ -7959,7 +7959,7 @@
             <a:pPr algn="ctr"/>
             <a:r>
               <a:rPr lang="en-GB" sz="8800" dirty="0"/>
-              <a:t>0.8 ÷ 5</a:t>
+              <a:t>0,8 ÷ 5</a:t>
             </a:r>
           </a:p>
         </p:txBody>
@@ -8247,7 +8247,7 @@
                   <a:schemeClr val="tx1"/>
                 </a:solidFill>
               </a:rPr>
-              <a:t>1.98</a:t>
+              <a:t>1,98</a:t>
             </a:r>
           </a:p>
         </p:txBody>
@@ -8283,7 +8283,7 @@
             <a:pPr algn="ctr"/>
             <a:r>
               <a:rPr lang="en-GB" sz="8800" dirty="0"/>
-              <a:t>1.1 × 1.8</a:t>
+              <a:t>1,1 × 1,8</a:t>
             </a:r>
           </a:p>
         </p:txBody>
@@ -18688,7 +18688,7 @@
                           <a:ea typeface="+mn-ea"/>
                           <a:cs typeface="+mn-cs"/>
                         </a:rPr>
-                        <a:t>0.2</a:t>
+                        <a:t>0,2</a:t>
                       </a:r>
                     </a:p>
                   </a:txBody>
@@ -18937,7 +18937,7 @@
                           <a:ea typeface="+mn-ea"/>
                           <a:cs typeface="+mn-cs"/>
                         </a:rPr>
-                        <a:t>2.8</a:t>
+                        <a:t>2,8</a:t>
                       </a:r>
                     </a:p>
                   </a:txBody>
@@ -19027,7 +19027,7 @@
                           <a:ea typeface="+mn-ea"/>
                           <a:cs typeface="+mn-cs"/>
                         </a:rPr>
-                        <a:t>1.98</a:t>
+                        <a:t>1,98</a:t>
                       </a:r>
                     </a:p>
                   </a:txBody>
@@ -19110,7 +19110,7 @@
                           <a:ea typeface="+mn-ea"/>
                           <a:cs typeface="+mn-cs"/>
                         </a:rPr>
-                        <a:t>2.1</a:t>
+                        <a:t>2,1</a:t>
                       </a:r>
                     </a:p>
                   </a:txBody>
@@ -19193,7 +19193,7 @@
                           <a:ea typeface="+mn-ea"/>
                           <a:cs typeface="+mn-cs"/>
                         </a:rPr>
-                        <a:t>0.42</a:t>
+                        <a:t>0,42</a:t>
                       </a:r>
                     </a:p>
                   </a:txBody>
@@ -19276,7 +19276,7 @@
                           <a:ea typeface="+mn-ea"/>
                           <a:cs typeface="+mn-cs"/>
                         </a:rPr>
-                        <a:t>0.18</a:t>
+                        <a:t>0,18</a:t>
                       </a:r>
                     </a:p>
                   </a:txBody>
@@ -19366,7 +19366,7 @@
                           <a:ea typeface="+mn-ea"/>
                           <a:cs typeface="+mn-cs"/>
                         </a:rPr>
-                        <a:t>1.2</a:t>
+                        <a:t>1,2</a:t>
                       </a:r>
                     </a:p>
                   </a:txBody>
@@ -19449,7 +19449,7 @@
                           <a:ea typeface="+mn-ea"/>
                           <a:cs typeface="+mn-cs"/>
                         </a:rPr>
-                        <a:t>0.64</a:t>
+                        <a:t>0,64</a:t>
                       </a:r>
                     </a:p>
                   </a:txBody>
@@ -19532,7 +19532,7 @@
                           <a:ea typeface="+mn-ea"/>
                           <a:cs typeface="+mn-cs"/>
                         </a:rPr>
-                        <a:t>8.4</a:t>
+                        <a:t>8,4</a:t>
                       </a:r>
                     </a:p>
                   </a:txBody>
@@ -19615,7 +19615,7 @@
                           <a:ea typeface="+mn-ea"/>
                           <a:cs typeface="+mn-cs"/>
                         </a:rPr>
-                        <a:t>0.16</a:t>
+                        <a:t>0,16</a:t>
                       </a:r>
                     </a:p>
                   </a:txBody>
@@ -19705,7 +19705,7 @@
                           <a:ea typeface="+mn-ea"/>
                           <a:cs typeface="+mn-cs"/>
                         </a:rPr>
-                        <a:t>0.35</a:t>
+                        <a:t>0,35</a:t>
                       </a:r>
                     </a:p>
                   </a:txBody>
@@ -19954,7 +19954,7 @@
                           <a:ea typeface="+mn-ea"/>
                           <a:cs typeface="+mn-cs"/>
                         </a:rPr>
-                        <a:t>6.3</a:t>
+                        <a:t>6,3</a:t>
                       </a:r>
                     </a:p>
                   </a:txBody>
@@ -21051,7 +21051,7 @@
                   <a:schemeClr val="tx1"/>
                 </a:solidFill>
               </a:rPr>
-              <a:t>2.1</a:t>
+              <a:t>2,1</a:t>
             </a:r>
           </a:p>
         </p:txBody>
@@ -21087,7 +21087,7 @@
             <a:pPr algn="ctr"/>
             <a:r>
               <a:rPr lang="en-GB" sz="8800" dirty="0"/>
-              <a:t>3 × 0.7</a:t>
+              <a:t>3 × 0,7</a:t>
             </a:r>
           </a:p>
         </p:txBody>
@@ -21375,7 +21375,7 @@
                   <a:schemeClr val="tx1"/>
                 </a:solidFill>
               </a:rPr>
-              <a:t>6.3</a:t>
+              <a:t>6,3</a:t>
             </a:r>
           </a:p>
         </p:txBody>
@@ -21411,7 +21411,7 @@
             <a:pPr algn="ctr"/>
             <a:r>
               <a:rPr lang="en-GB" sz="8800" dirty="0"/>
-              <a:t>3 × 2.1</a:t>
+              <a:t>3 × 2,1</a:t>
             </a:r>
           </a:p>
         </p:txBody>
@@ -21735,7 +21735,7 @@
             <a:pPr algn="ctr"/>
             <a:r>
               <a:rPr lang="en-GB" sz="8800" dirty="0"/>
-              <a:t>3 ÷ 0.5</a:t>
+              <a:t>3 ÷ 0,5</a:t>
             </a:r>
           </a:p>
         </p:txBody>
@@ -22023,7 +22023,7 @@
                   <a:schemeClr val="tx1"/>
                 </a:solidFill>
               </a:rPr>
-              <a:t>2.8</a:t>
+              <a:t>2,8</a:t>
             </a:r>
           </a:p>
         </p:txBody>
@@ -22059,7 +22059,7 @@
             <a:pPr algn="ctr"/>
             <a:r>
               <a:rPr lang="en-GB" sz="8800" dirty="0"/>
-              <a:t>0.7 × 4</a:t>
+              <a:t>0,7 × 4</a:t>
             </a:r>
           </a:p>
         </p:txBody>
@@ -22347,7 +22347,7 @@
                   <a:schemeClr val="tx1"/>
                 </a:solidFill>
               </a:rPr>
-              <a:t>1.2</a:t>
+              <a:t>1,2</a:t>
             </a:r>
           </a:p>
         </p:txBody>
@@ -22383,7 +22383,7 @@
             <a:pPr algn="ctr"/>
             <a:r>
               <a:rPr lang="en-GB" sz="8800" dirty="0"/>
-              <a:t>3.6 ÷ 3</a:t>
+              <a:t>3,6 ÷ 3</a:t>
             </a:r>
           </a:p>
         </p:txBody>
@@ -22707,7 +22707,7 @@
             <a:pPr algn="ctr"/>
             <a:r>
               <a:rPr lang="en-GB" sz="8800" dirty="0"/>
-              <a:t>1.8 ÷ 0.2</a:t>
+              <a:t>1,8 ÷ 0,2</a:t>
             </a:r>
           </a:p>
         </p:txBody>
